--- a/Sample code/Figure 7. N_limit dependence on parameters/Figure 7 - Nsteps.pptx
+++ b/Sample code/Figure 7. N_limit dependence on parameters/Figure 7 - Nsteps.pptx
@@ -104,6 +104,11 @@
       </a:defRPr>
     </a:lvl9pPr>
   </p:defaultTextStyle>
+  <p:extLst>
+    <p:ext uri="{EFAFB233-063F-42B5-8137-9DF3F51BA10A}">
+      <p15:sldGuideLst xmlns:p15="http://schemas.microsoft.com/office/powerpoint/2012/main"/>
+    </p:ext>
+  </p:extLst>
 </p:presentation>
 </file>
 
@@ -254,7 +259,7 @@
           <a:p>
             <a:fld id="{BE7A8A13-8D72-A04A-B2C1-C42F42AA96D9}" type="datetimeFigureOut">
               <a:rPr lang="en-US" smtClean="0"/>
-              <a:t>9/2/26</a:t>
+              <a:t>9/7/26</a:t>
             </a:fld>
             <a:endParaRPr lang="en-US"/>
           </a:p>
@@ -452,7 +457,7 @@
           <a:p>
             <a:fld id="{BE7A8A13-8D72-A04A-B2C1-C42F42AA96D9}" type="datetimeFigureOut">
               <a:rPr lang="en-US" smtClean="0"/>
-              <a:t>9/2/26</a:t>
+              <a:t>9/7/26</a:t>
             </a:fld>
             <a:endParaRPr lang="en-US"/>
           </a:p>
@@ -660,7 +665,7 @@
           <a:p>
             <a:fld id="{BE7A8A13-8D72-A04A-B2C1-C42F42AA96D9}" type="datetimeFigureOut">
               <a:rPr lang="en-US" smtClean="0"/>
-              <a:t>9/2/26</a:t>
+              <a:t>9/7/26</a:t>
             </a:fld>
             <a:endParaRPr lang="en-US"/>
           </a:p>
@@ -858,7 +863,7 @@
           <a:p>
             <a:fld id="{BE7A8A13-8D72-A04A-B2C1-C42F42AA96D9}" type="datetimeFigureOut">
               <a:rPr lang="en-US" smtClean="0"/>
-              <a:t>9/2/26</a:t>
+              <a:t>9/7/26</a:t>
             </a:fld>
             <a:endParaRPr lang="en-US"/>
           </a:p>
@@ -1133,7 +1138,7 @@
           <a:p>
             <a:fld id="{BE7A8A13-8D72-A04A-B2C1-C42F42AA96D9}" type="datetimeFigureOut">
               <a:rPr lang="en-US" smtClean="0"/>
-              <a:t>9/2/26</a:t>
+              <a:t>9/7/26</a:t>
             </a:fld>
             <a:endParaRPr lang="en-US"/>
           </a:p>
@@ -1398,7 +1403,7 @@
           <a:p>
             <a:fld id="{BE7A8A13-8D72-A04A-B2C1-C42F42AA96D9}" type="datetimeFigureOut">
               <a:rPr lang="en-US" smtClean="0"/>
-              <a:t>9/2/26</a:t>
+              <a:t>9/7/26</a:t>
             </a:fld>
             <a:endParaRPr lang="en-US"/>
           </a:p>
@@ -1810,7 +1815,7 @@
           <a:p>
             <a:fld id="{BE7A8A13-8D72-A04A-B2C1-C42F42AA96D9}" type="datetimeFigureOut">
               <a:rPr lang="en-US" smtClean="0"/>
-              <a:t>9/2/26</a:t>
+              <a:t>9/7/26</a:t>
             </a:fld>
             <a:endParaRPr lang="en-US"/>
           </a:p>
@@ -1951,7 +1956,7 @@
           <a:p>
             <a:fld id="{BE7A8A13-8D72-A04A-B2C1-C42F42AA96D9}" type="datetimeFigureOut">
               <a:rPr lang="en-US" smtClean="0"/>
-              <a:t>9/2/26</a:t>
+              <a:t>9/7/26</a:t>
             </a:fld>
             <a:endParaRPr lang="en-US"/>
           </a:p>
@@ -2064,7 +2069,7 @@
           <a:p>
             <a:fld id="{BE7A8A13-8D72-A04A-B2C1-C42F42AA96D9}" type="datetimeFigureOut">
               <a:rPr lang="en-US" smtClean="0"/>
-              <a:t>9/2/26</a:t>
+              <a:t>9/7/26</a:t>
             </a:fld>
             <a:endParaRPr lang="en-US"/>
           </a:p>
@@ -2375,7 +2380,7 @@
           <a:p>
             <a:fld id="{BE7A8A13-8D72-A04A-B2C1-C42F42AA96D9}" type="datetimeFigureOut">
               <a:rPr lang="en-US" smtClean="0"/>
-              <a:t>9/2/26</a:t>
+              <a:t>9/7/26</a:t>
             </a:fld>
             <a:endParaRPr lang="en-US"/>
           </a:p>
@@ -2663,7 +2668,7 @@
           <a:p>
             <a:fld id="{BE7A8A13-8D72-A04A-B2C1-C42F42AA96D9}" type="datetimeFigureOut">
               <a:rPr lang="en-US" smtClean="0"/>
-              <a:t>9/2/26</a:t>
+              <a:t>9/7/26</a:t>
             </a:fld>
             <a:endParaRPr lang="en-US"/>
           </a:p>
@@ -2904,7 +2909,7 @@
           <a:p>
             <a:fld id="{BE7A8A13-8D72-A04A-B2C1-C42F42AA96D9}" type="datetimeFigureOut">
               <a:rPr lang="en-US" smtClean="0"/>
-              <a:t>9/2/26</a:t>
+              <a:t>9/7/26</a:t>
             </a:fld>
             <a:endParaRPr lang="en-US"/>
           </a:p>
@@ -3321,12 +3326,102 @@
           <a:chExt cx="0" cy="0"/>
         </a:xfrm>
       </p:grpSpPr>
+      <p:sp>
+        <p:nvSpPr>
+          <p:cNvPr id="15" name="TextBox 14">
+            <a:extLst>
+              <a:ext uri="{FF2B5EF4-FFF2-40B4-BE49-F238E27FC236}">
+                <a16:creationId xmlns:a16="http://schemas.microsoft.com/office/drawing/2014/main" id="{970E4FF7-00FA-0561-B227-CB8E47FA59A9}"/>
+              </a:ext>
+            </a:extLst>
+          </p:cNvPr>
+          <p:cNvSpPr txBox="1"/>
+          <p:nvPr/>
+        </p:nvSpPr>
+        <p:spPr>
+          <a:xfrm>
+            <a:off x="1467853" y="3737811"/>
+            <a:ext cx="6400800" cy="1200329"/>
+          </a:xfrm>
+          <a:prstGeom prst="rect">
+            <a:avLst/>
+          </a:prstGeom>
+          <a:noFill/>
+        </p:spPr>
+        <p:txBody>
+          <a:bodyPr wrap="square" rtlCol="0">
+            <a:spAutoFit/>
+          </a:bodyPr>
+          <a:lstStyle/>
+          <a:p>
+            <a:r>
+              <a:rPr lang="en-US" dirty="0"/>
+              <a:t>To get this in the form I needed for overleaf, I </a:t>
+            </a:r>
+          </a:p>
+          <a:p>
+            <a:pPr marL="285750" indent="-285750">
+              <a:buFont typeface="Arial" panose="020B0604020202020204" pitchFamily="34" charset="0"/>
+              <a:buChar char="•"/>
+            </a:pPr>
+            <a:r>
+              <a:rPr lang="en-US" dirty="0"/>
+              <a:t>Did a “save as” pdf</a:t>
+            </a:r>
+          </a:p>
+          <a:p>
+            <a:pPr marL="285750" indent="-285750">
+              <a:buFont typeface="Arial" panose="020B0604020202020204" pitchFamily="34" charset="0"/>
+              <a:buChar char="•"/>
+            </a:pPr>
+            <a:r>
+              <a:rPr lang="en-US" dirty="0"/>
+              <a:t>Opened in Preview, did a tools/rectangular selection/crop, then exported as </a:t>
+            </a:r>
+            <a:r>
+              <a:rPr lang="en-US" dirty="0" err="1"/>
+              <a:t>png</a:t>
+            </a:r>
+            <a:endParaRPr lang="en-US" dirty="0"/>
+          </a:p>
+        </p:txBody>
+      </p:sp>
+      <p:pic>
+        <p:nvPicPr>
+          <p:cNvPr id="2" name="Picture 1">
+            <a:extLst>
+              <a:ext uri="{FF2B5EF4-FFF2-40B4-BE49-F238E27FC236}">
+                <a16:creationId xmlns:a16="http://schemas.microsoft.com/office/drawing/2014/main" id="{62413C0C-3B0D-D90F-E2CD-6AAFDA0EFA6E}"/>
+              </a:ext>
+            </a:extLst>
+          </p:cNvPr>
+          <p:cNvPicPr>
+            <a:picLocks noChangeAspect="1"/>
+          </p:cNvPicPr>
+          <p:nvPr/>
+        </p:nvPicPr>
+        <p:blipFill>
+          <a:blip r:embed="rId2"/>
+          <a:stretch>
+            <a:fillRect/>
+          </a:stretch>
+        </p:blipFill>
+        <p:spPr>
+          <a:xfrm>
+            <a:off x="774301" y="768165"/>
+            <a:ext cx="3459480" cy="2594610"/>
+          </a:xfrm>
+          <a:prstGeom prst="rect">
+            <a:avLst/>
+          </a:prstGeom>
+        </p:spPr>
+      </p:pic>
       <p:grpSp>
         <p:nvGrpSpPr>
-          <p:cNvPr id="17" name="Group 16">
-            <a:extLst>
-              <a:ext uri="{FF2B5EF4-FFF2-40B4-BE49-F238E27FC236}">
-                <a16:creationId xmlns:a16="http://schemas.microsoft.com/office/drawing/2014/main" id="{22640F5B-20C3-C745-D6DE-4E4B0A0A4D1B}"/>
+          <p:cNvPr id="6" name="Group 5">
+            <a:extLst>
+              <a:ext uri="{FF2B5EF4-FFF2-40B4-BE49-F238E27FC236}">
+                <a16:creationId xmlns:a16="http://schemas.microsoft.com/office/drawing/2014/main" id="{97392A05-0BC0-136E-1EDE-59390CFDDBC5}"/>
               </a:ext>
             </a:extLst>
           </p:cNvPr>
@@ -3335,42 +3430,12 @@
         </p:nvGrpSpPr>
         <p:grpSpPr>
           <a:xfrm>
-            <a:off x="391684" y="398176"/>
-            <a:ext cx="7296852" cy="3030824"/>
-            <a:chOff x="391684" y="398176"/>
-            <a:chExt cx="7296852" cy="3030824"/>
+            <a:off x="2184225" y="398833"/>
+            <a:ext cx="7202125" cy="370600"/>
+            <a:chOff x="2184225" y="398833"/>
+            <a:chExt cx="7202125" cy="370600"/>
           </a:xfrm>
         </p:grpSpPr>
-        <p:pic>
-          <p:nvPicPr>
-            <p:cNvPr id="16" name="Picture 15">
-              <a:extLst>
-                <a:ext uri="{FF2B5EF4-FFF2-40B4-BE49-F238E27FC236}">
-                  <a16:creationId xmlns:a16="http://schemas.microsoft.com/office/drawing/2014/main" id="{E45CA2E5-FE75-7695-21DF-F96AD0B934A8}"/>
-                </a:ext>
-              </a:extLst>
-            </p:cNvPr>
-            <p:cNvPicPr>
-              <a:picLocks noChangeAspect="1"/>
-            </p:cNvPicPr>
-            <p:nvPr/>
-          </p:nvPicPr>
-          <p:blipFill>
-            <a:blip r:embed="rId2"/>
-            <a:stretch>
-              <a:fillRect/>
-            </a:stretch>
-          </p:blipFill>
-          <p:spPr>
-            <a:xfrm>
-              <a:off x="391684" y="398176"/>
-              <a:ext cx="3936127" cy="2952095"/>
-            </a:xfrm>
-            <a:prstGeom prst="rect">
-              <a:avLst/>
-            </a:prstGeom>
-          </p:spPr>
-        </p:pic>
         <p:grpSp>
           <p:nvGrpSpPr>
             <p:cNvPr id="14" name="Group 13">
@@ -3386,9 +3451,9 @@
           <p:grpSpPr>
             <a:xfrm>
               <a:off x="2184225" y="398833"/>
-              <a:ext cx="5504311" cy="3030167"/>
+              <a:ext cx="3836352" cy="370600"/>
               <a:chOff x="1871404" y="264968"/>
-              <a:chExt cx="5504311" cy="3030167"/>
+              <a:chExt cx="3836352" cy="370600"/>
             </a:xfrm>
           </p:grpSpPr>
           <p:sp>
@@ -3441,7 +3506,7 @@
             </p:nvSpPr>
             <p:spPr>
               <a:xfrm>
-                <a:off x="5444998" y="264968"/>
+                <a:off x="5182239" y="266236"/>
                 <a:ext cx="525517" cy="369332"/>
               </a:xfrm>
               <a:prstGeom prst="rect">
@@ -3463,98 +3528,104 @@
               </a:p>
             </p:txBody>
           </p:sp>
-          <p:pic>
-            <p:nvPicPr>
-              <p:cNvPr id="12" name="Picture 11">
-                <a:extLst>
-                  <a:ext uri="{FF2B5EF4-FFF2-40B4-BE49-F238E27FC236}">
-                    <a16:creationId xmlns:a16="http://schemas.microsoft.com/office/drawing/2014/main" id="{02F448E4-C06A-D08C-9406-A82C9181D867}"/>
-                  </a:ext>
-                </a:extLst>
-              </p:cNvPr>
-              <p:cNvPicPr>
-                <a:picLocks noChangeAspect="1"/>
-              </p:cNvPicPr>
-              <p:nvPr/>
-            </p:nvPicPr>
-            <p:blipFill>
-              <a:blip r:embed="rId3"/>
-              <a:stretch>
-                <a:fillRect/>
-              </a:stretch>
-            </p:blipFill>
-            <p:spPr>
-              <a:xfrm>
-                <a:off x="3829877" y="546804"/>
-                <a:ext cx="3545838" cy="2748331"/>
-              </a:xfrm>
-              <a:prstGeom prst="rect">
-                <a:avLst/>
-              </a:prstGeom>
-            </p:spPr>
-          </p:pic>
         </p:grpSp>
+        <p:sp>
+          <p:nvSpPr>
+            <p:cNvPr id="4" name="TextBox 3">
+              <a:extLst>
+                <a:ext uri="{FF2B5EF4-FFF2-40B4-BE49-F238E27FC236}">
+                  <a16:creationId xmlns:a16="http://schemas.microsoft.com/office/drawing/2014/main" id="{1F8AF5FC-B229-4423-743C-31BC8155CC7A}"/>
+                </a:ext>
+              </a:extLst>
+            </p:cNvPr>
+            <p:cNvSpPr txBox="1"/>
+            <p:nvPr/>
+          </p:nvSpPr>
+          <p:spPr>
+            <a:xfrm>
+              <a:off x="8860833" y="398833"/>
+              <a:ext cx="525517" cy="369332"/>
+            </a:xfrm>
+            <a:prstGeom prst="rect">
+              <a:avLst/>
+            </a:prstGeom>
+            <a:noFill/>
+          </p:spPr>
+          <p:txBody>
+            <a:bodyPr wrap="square" rtlCol="0">
+              <a:spAutoFit/>
+            </a:bodyPr>
+            <a:lstStyle/>
+            <a:p>
+              <a:pPr algn="ctr"/>
+              <a:r>
+                <a:rPr lang="en-US" dirty="0"/>
+                <a:t>(c)</a:t>
+              </a:r>
+            </a:p>
+          </p:txBody>
+        </p:sp>
       </p:grpSp>
-      <p:sp>
-        <p:nvSpPr>
-          <p:cNvPr id="15" name="TextBox 14">
-            <a:extLst>
-              <a:ext uri="{FF2B5EF4-FFF2-40B4-BE49-F238E27FC236}">
-                <a16:creationId xmlns:a16="http://schemas.microsoft.com/office/drawing/2014/main" id="{970E4FF7-00FA-0561-B227-CB8E47FA59A9}"/>
-              </a:ext>
-            </a:extLst>
-          </p:cNvPr>
-          <p:cNvSpPr txBox="1"/>
+      <p:pic>
+        <p:nvPicPr>
+          <p:cNvPr id="5" name="Picture 4">
+            <a:extLst>
+              <a:ext uri="{FF2B5EF4-FFF2-40B4-BE49-F238E27FC236}">
+                <a16:creationId xmlns:a16="http://schemas.microsoft.com/office/drawing/2014/main" id="{95898914-25AA-63D9-B52C-6746F1913C99}"/>
+              </a:ext>
+            </a:extLst>
+          </p:cNvPr>
+          <p:cNvPicPr>
+            <a:picLocks noChangeAspect="1"/>
+          </p:cNvPicPr>
           <p:nvPr/>
-        </p:nvSpPr>
+        </p:nvPicPr>
+        <p:blipFill>
+          <a:blip r:embed="rId3"/>
+          <a:stretch>
+            <a:fillRect/>
+          </a:stretch>
+        </p:blipFill>
         <p:spPr>
           <a:xfrm>
-            <a:off x="1467853" y="3737811"/>
-            <a:ext cx="6400800" cy="1200329"/>
+            <a:off x="4075380" y="1026345"/>
+            <a:ext cx="3192936" cy="2375761"/>
           </a:xfrm>
           <a:prstGeom prst="rect">
             <a:avLst/>
           </a:prstGeom>
-          <a:noFill/>
         </p:spPr>
-        <p:txBody>
-          <a:bodyPr wrap="square" rtlCol="0">
-            <a:spAutoFit/>
-          </a:bodyPr>
-          <a:lstStyle/>
-          <a:p>
-            <a:r>
-              <a:rPr lang="en-US" dirty="0"/>
-              <a:t>To get this in the form I needed for overleaf, I </a:t>
-            </a:r>
-          </a:p>
-          <a:p>
-            <a:pPr marL="285750" indent="-285750">
-              <a:buFont typeface="Arial" panose="020B0604020202020204" pitchFamily="34" charset="0"/>
-              <a:buChar char="•"/>
-            </a:pPr>
-            <a:r>
-              <a:rPr lang="en-US" dirty="0"/>
-              <a:t>Did a “save as” pdf</a:t>
-            </a:r>
-          </a:p>
-          <a:p>
-            <a:pPr marL="285750" indent="-285750">
-              <a:buFont typeface="Arial" panose="020B0604020202020204" pitchFamily="34" charset="0"/>
-              <a:buChar char="•"/>
-            </a:pPr>
-            <a:r>
-              <a:rPr lang="en-US" dirty="0"/>
-              <a:t>Opened in Preview, did a tools/rectangular selection/crop, then exported as </a:t>
-            </a:r>
-            <a:r>
-              <a:rPr lang="en-US" dirty="0" err="1"/>
-              <a:t>png</a:t>
-            </a:r>
-            <a:endParaRPr lang="en-US" dirty="0"/>
-          </a:p>
-        </p:txBody>
-      </p:sp>
+      </p:pic>
+      <p:pic>
+        <p:nvPicPr>
+          <p:cNvPr id="9" name="Picture 8">
+            <a:extLst>
+              <a:ext uri="{FF2B5EF4-FFF2-40B4-BE49-F238E27FC236}">
+                <a16:creationId xmlns:a16="http://schemas.microsoft.com/office/drawing/2014/main" id="{19318E97-B1D4-2D85-E27C-38ADEDFFDAE9}"/>
+              </a:ext>
+            </a:extLst>
+          </p:cNvPr>
+          <p:cNvPicPr>
+            <a:picLocks noChangeAspect="1"/>
+          </p:cNvPicPr>
+          <p:nvPr/>
+        </p:nvPicPr>
+        <p:blipFill>
+          <a:blip r:embed="rId4"/>
+          <a:stretch>
+            <a:fillRect/>
+          </a:stretch>
+        </p:blipFill>
+        <p:spPr>
+          <a:xfrm>
+            <a:off x="7354212" y="768165"/>
+            <a:ext cx="3478053" cy="2608540"/>
+          </a:xfrm>
+          <a:prstGeom prst="rect">
+            <a:avLst/>
+          </a:prstGeom>
+        </p:spPr>
+      </p:pic>
     </p:spTree>
     <p:extLst>
       <p:ext uri="{BB962C8B-B14F-4D97-AF65-F5344CB8AC3E}">
